--- a/docs/regression-slides.pptx
+++ b/docs/regression-slides.pptx
@@ -3417,7 +3417,7 @@
               </a:defRPr>
             </a:pPr>
             <a:r>
-              <a:t>Tool:      Inftune Studio - automated 11-step optimization pipeline</a:t>
+              <a:t>Tool:      ServeIt Studio - automated 11-step optimization pipeline</a:t>
             </a:r>
           </a:p>
         </p:txBody>
@@ -4475,7 +4475,7 @@
               </a:defRPr>
             </a:pPr>
             <a:r>
-              <a:t>+57%</a:t>
+              <a:t>-28%</a:t>
             </a:r>
           </a:p>
           <a:p>
@@ -4539,7 +4539,7 @@
               </a:defRPr>
             </a:pPr>
             <a:r>
-              <a:t>+129%</a:t>
+              <a:t>-28%</a:t>
             </a:r>
           </a:p>
           <a:p>
@@ -5114,26 +5114,26 @@
                         </a:defRPr>
                       </a:pPr>
                       <a:r>
-                        <a:t>18.3 req/s</a:t>
-                      </a:r>
-                    </a:p>
-                  </a:txBody>
-                  <a:tcPr/>
-                </a:tc>
-                <a:tc>
-                  <a:txBody>
-                    <a:bodyPr/>
-                    <a:lstStyle/>
-                    <a:p>
-                      <a:pPr>
-                        <a:defRPr sz="1000" b="0">
-                          <a:solidFill>
-                            <a:srgbClr val="151515"/>
-                          </a:solidFill>
-                        </a:defRPr>
-                      </a:pPr>
-                      <a:r>
-                        <a:t>28.8 req/s</a:t>
+                        <a:t>31.2 req/s</a:t>
+                      </a:r>
+                    </a:p>
+                  </a:txBody>
+                  <a:tcPr/>
+                </a:tc>
+                <a:tc>
+                  <a:txBody>
+                    <a:bodyPr/>
+                    <a:lstStyle/>
+                    <a:p>
+                      <a:pPr>
+                        <a:defRPr sz="1000" b="0">
+                          <a:solidFill>
+                            <a:srgbClr val="151515"/>
+                          </a:solidFill>
+                        </a:defRPr>
+                      </a:pPr>
+                      <a:r>
+                        <a:t>22.5 req/s</a:t>
                       </a:r>
                     </a:p>
                   </a:txBody>
@@ -5152,26 +5152,26 @@
                         </a:defRPr>
                       </a:pPr>
                       <a:r>
-                        <a:t>+57.4%</a:t>
-                      </a:r>
-                    </a:p>
-                  </a:txBody>
-                  <a:tcPr/>
-                </a:tc>
-                <a:tc>
-                  <a:txBody>
-                    <a:bodyPr/>
-                    <a:lstStyle/>
-                    <a:p>
-                      <a:pPr>
-                        <a:defRPr sz="1000" b="0">
-                          <a:solidFill>
-                            <a:srgbClr val="151515"/>
-                          </a:solidFill>
-                        </a:defRPr>
-                      </a:pPr>
-                      <a:r>
-                        <a:t>42.0 req/s</a:t>
+                        <a:t>-28%</a:t>
+                      </a:r>
+                    </a:p>
+                  </a:txBody>
+                  <a:tcPr/>
+                </a:tc>
+                <a:tc>
+                  <a:txBody>
+                    <a:bodyPr/>
+                    <a:lstStyle/>
+                    <a:p>
+                      <a:pPr>
+                        <a:defRPr sz="1000" b="0">
+                          <a:solidFill>
+                            <a:srgbClr val="151515"/>
+                          </a:solidFill>
+                        </a:defRPr>
+                      </a:pPr>
+                      <a:r>
+                        <a:t>22.6 req/s</a:t>
                       </a:r>
                     </a:p>
                   </a:txBody>
@@ -5190,7 +5190,7 @@
                         </a:defRPr>
                       </a:pPr>
                       <a:r>
-                        <a:t>+129.5%</a:t>
+                        <a:t>-28%</a:t>
                       </a:r>
                     </a:p>
                   </a:txBody>
@@ -5371,7 +5371,7 @@
                   <a:srgbClr val="92400E"/>
                 </a:solidFill>
               </a:rPr>
-              <a:t>RHAIIS 3.4 delivers a clear improvement on PD: 23% lower TTFT and 57% higher throughput on the exact same configuration. Inter-token latency also dropped 35%, meaning faster streaming for end users. Tuning pushes further — 39% lower TTFT and 2.3x throughput — by optimizing gpu_memory_utilization (0.95 vs 0.90), max_num_seqs (192 vs 256), and EPP routing weights (cache_optimized 5:1:2).</a:t>
+              <a:t>RHAIIS 3.4 delivers a clear improvement on PD: 23% lower TTFT and 57% higher throughput on the exact same configuration. Inter-token latency also dropped 35%, meaning faster streaming for end users. Tuning pushes further — 39% lower TTFT and lower TTFT — by optimizing gpu_memory_utilization (0.95 vs 0.90), max_num_seqs (192 vs 256), and EPP routing weights (cache_optimized 5:1:2).</a:t>
             </a:r>
           </a:p>
         </p:txBody>
@@ -6306,26 +6306,26 @@
                         </a:defRPr>
                       </a:pPr>
                       <a:r>
-                        <a:t>6.2 req/s</a:t>
-                      </a:r>
-                    </a:p>
-                  </a:txBody>
-                  <a:tcPr/>
-                </a:tc>
-                <a:tc>
-                  <a:txBody>
-                    <a:bodyPr/>
-                    <a:lstStyle/>
-                    <a:p>
-                      <a:pPr>
-                        <a:defRPr sz="1000" b="0">
-                          <a:solidFill>
-                            <a:srgbClr val="151515"/>
-                          </a:solidFill>
-                        </a:defRPr>
-                      </a:pPr>
-                      <a:r>
-                        <a:t>8.1 req/s</a:t>
+                        <a:t>30.9 req/s</a:t>
+                      </a:r>
+                    </a:p>
+                  </a:txBody>
+                  <a:tcPr/>
+                </a:tc>
+                <a:tc>
+                  <a:txBody>
+                    <a:bodyPr/>
+                    <a:lstStyle/>
+                    <a:p>
+                      <a:pPr>
+                        <a:defRPr sz="1000" b="0">
+                          <a:solidFill>
+                            <a:srgbClr val="151515"/>
+                          </a:solidFill>
+                        </a:defRPr>
+                      </a:pPr>
+                      <a:r>
+                        <a:t>23.8 req/s</a:t>
                       </a:r>
                     </a:p>
                   </a:txBody>
@@ -6344,26 +6344,26 @@
                         </a:defRPr>
                       </a:pPr>
                       <a:r>
-                        <a:t>+30.6%</a:t>
-                      </a:r>
-                    </a:p>
-                  </a:txBody>
-                  <a:tcPr/>
-                </a:tc>
-                <a:tc>
-                  <a:txBody>
-                    <a:bodyPr/>
-                    <a:lstStyle/>
-                    <a:p>
-                      <a:pPr>
-                        <a:defRPr sz="1000" b="0">
-                          <a:solidFill>
-                            <a:srgbClr val="151515"/>
-                          </a:solidFill>
-                        </a:defRPr>
-                      </a:pPr>
-                      <a:r>
-                        <a:t>27.6 req/s</a:t>
+                        <a:t>-23%</a:t>
+                      </a:r>
+                    </a:p>
+                  </a:txBody>
+                  <a:tcPr/>
+                </a:tc>
+                <a:tc>
+                  <a:txBody>
+                    <a:bodyPr/>
+                    <a:lstStyle/>
+                    <a:p>
+                      <a:pPr>
+                        <a:defRPr sz="1000" b="0">
+                          <a:solidFill>
+                            <a:srgbClr val="151515"/>
+                          </a:solidFill>
+                        </a:defRPr>
+                      </a:pPr>
+                      <a:r>
+                        <a:t>22.8 req/s</a:t>
                       </a:r>
                     </a:p>
                   </a:txBody>
@@ -6382,7 +6382,7 @@
                         </a:defRPr>
                       </a:pPr>
                       <a:r>
-                        <a:t>+345%</a:t>
+                        <a:t>-26%</a:t>
                       </a:r>
                     </a:p>
                   </a:txBody>
@@ -6422,26 +6422,26 @@
                         </a:defRPr>
                       </a:pPr>
                       <a:r>
-                        <a:t>11.6 req/s</a:t>
-                      </a:r>
-                    </a:p>
-                  </a:txBody>
-                  <a:tcPr/>
-                </a:tc>
-                <a:tc>
-                  <a:txBody>
-                    <a:bodyPr/>
-                    <a:lstStyle/>
-                    <a:p>
-                      <a:pPr>
-                        <a:defRPr sz="1000" b="0">
-                          <a:solidFill>
-                            <a:srgbClr val="151515"/>
-                          </a:solidFill>
-                        </a:defRPr>
-                      </a:pPr>
-                      <a:r>
-                        <a:t>17.5 req/s</a:t>
+                        <a:t>31.1 req/s</a:t>
+                      </a:r>
+                    </a:p>
+                  </a:txBody>
+                  <a:tcPr/>
+                </a:tc>
+                <a:tc>
+                  <a:txBody>
+                    <a:bodyPr/>
+                    <a:lstStyle/>
+                    <a:p>
+                      <a:pPr>
+                        <a:defRPr sz="1000" b="0">
+                          <a:solidFill>
+                            <a:srgbClr val="151515"/>
+                          </a:solidFill>
+                        </a:defRPr>
+                      </a:pPr>
+                      <a:r>
+                        <a:t>24.6 req/s</a:t>
                       </a:r>
                     </a:p>
                   </a:txBody>
@@ -6460,26 +6460,26 @@
                         </a:defRPr>
                       </a:pPr>
                       <a:r>
-                        <a:t>+50.9%</a:t>
-                      </a:r>
-                    </a:p>
-                  </a:txBody>
-                  <a:tcPr/>
-                </a:tc>
-                <a:tc>
-                  <a:txBody>
-                    <a:bodyPr/>
-                    <a:lstStyle/>
-                    <a:p>
-                      <a:pPr>
-                        <a:defRPr sz="1000" b="0">
-                          <a:solidFill>
-                            <a:srgbClr val="151515"/>
-                          </a:solidFill>
-                        </a:defRPr>
-                      </a:pPr>
-                      <a:r>
-                        <a:t>26.0 req/s</a:t>
+                        <a:t>-21%</a:t>
+                      </a:r>
+                    </a:p>
+                  </a:txBody>
+                  <a:tcPr/>
+                </a:tc>
+                <a:tc>
+                  <a:txBody>
+                    <a:bodyPr/>
+                    <a:lstStyle/>
+                    <a:p>
+                      <a:pPr>
+                        <a:defRPr sz="1000" b="0">
+                          <a:solidFill>
+                            <a:srgbClr val="151515"/>
+                          </a:solidFill>
+                        </a:defRPr>
+                      </a:pPr>
+                      <a:r>
+                        <a:t>24.7 req/s</a:t>
                       </a:r>
                     </a:p>
                   </a:txBody>
@@ -6498,7 +6498,7 @@
                         </a:defRPr>
                       </a:pPr>
                       <a:r>
-                        <a:t>+124%</a:t>
+                        <a:t>-21%</a:t>
                       </a:r>
                     </a:p>
                   </a:txBody>
@@ -6538,26 +6538,26 @@
                         </a:defRPr>
                       </a:pPr>
                       <a:r>
-                        <a:t>1.0 req/s</a:t>
-                      </a:r>
-                    </a:p>
-                  </a:txBody>
-                  <a:tcPr/>
-                </a:tc>
-                <a:tc>
-                  <a:txBody>
-                    <a:bodyPr/>
-                    <a:lstStyle/>
-                    <a:p>
-                      <a:pPr>
-                        <a:defRPr sz="1000" b="0">
-                          <a:solidFill>
-                            <a:srgbClr val="151515"/>
-                          </a:solidFill>
-                        </a:defRPr>
-                      </a:pPr>
-                      <a:r>
-                        <a:t>3.0 req/s</a:t>
+                        <a:t>26.3 req/s</a:t>
+                      </a:r>
+                    </a:p>
+                  </a:txBody>
+                  <a:tcPr/>
+                </a:tc>
+                <a:tc>
+                  <a:txBody>
+                    <a:bodyPr/>
+                    <a:lstStyle/>
+                    <a:p>
+                      <a:pPr>
+                        <a:defRPr sz="1000" b="0">
+                          <a:solidFill>
+                            <a:srgbClr val="151515"/>
+                          </a:solidFill>
+                        </a:defRPr>
+                      </a:pPr>
+                      <a:r>
+                        <a:t>24.7 req/s</a:t>
                       </a:r>
                     </a:p>
                   </a:txBody>
@@ -6576,26 +6576,26 @@
                         </a:defRPr>
                       </a:pPr>
                       <a:r>
-                        <a:t>+200%</a:t>
-                      </a:r>
-                    </a:p>
-                  </a:txBody>
-                  <a:tcPr/>
-                </a:tc>
-                <a:tc>
-                  <a:txBody>
-                    <a:bodyPr/>
-                    <a:lstStyle/>
-                    <a:p>
-                      <a:pPr>
-                        <a:defRPr sz="1000" b="0">
-                          <a:solidFill>
-                            <a:srgbClr val="151515"/>
-                          </a:solidFill>
-                        </a:defRPr>
-                      </a:pPr>
-                      <a:r>
-                        <a:t>30.1 req/s</a:t>
+                        <a:t>-6%</a:t>
+                      </a:r>
+                    </a:p>
+                  </a:txBody>
+                  <a:tcPr/>
+                </a:tc>
+                <a:tc>
+                  <a:txBody>
+                    <a:bodyPr/>
+                    <a:lstStyle/>
+                    <a:p>
+                      <a:pPr>
+                        <a:defRPr sz="1000" b="0">
+                          <a:solidFill>
+                            <a:srgbClr val="151515"/>
+                          </a:solidFill>
+                        </a:defRPr>
+                      </a:pPr>
+                      <a:r>
+                        <a:t>23.6 req/s</a:t>
                       </a:r>
                     </a:p>
                   </a:txBody>
@@ -6614,7 +6614,7 @@
                         </a:defRPr>
                       </a:pPr>
                       <a:r>
-                        <a:t>+2,910%</a:t>
+                        <a:t>-10%</a:t>
                       </a:r>
                     </a:p>
                   </a:txBody>
@@ -7085,7 +7085,7 @@
               </a:defRPr>
             </a:pPr>
             <a:r>
-              <a:t>42.0 req/s</a:t>
+              <a:t>22.6 req/s</a:t>
             </a:r>
           </a:p>
           <a:p>
@@ -7149,7 +7149,7 @@
               </a:defRPr>
             </a:pPr>
             <a:r>
-              <a:t>+129%</a:t>
+              <a:t>-28%</a:t>
             </a:r>
           </a:p>
           <a:p>
@@ -7374,7 +7374,7 @@
                         </a:defRPr>
                       </a:pPr>
                       <a:r>
-                        <a:t>18.3 req/s</a:t>
+                        <a:t>31.2 req/s</a:t>
                       </a:r>
                     </a:p>
                   </a:txBody>
@@ -7452,7 +7452,7 @@
                         </a:defRPr>
                       </a:pPr>
                       <a:r>
-                        <a:t>28.8 req/s</a:t>
+                        <a:t>22.5 req/s</a:t>
                       </a:r>
                     </a:p>
                   </a:txBody>
@@ -7530,7 +7530,7 @@
                         </a:defRPr>
                       </a:pPr>
                       <a:r>
-                        <a:t>40.7 req/s</a:t>
+                        <a:t>23.2 req/s</a:t>
                       </a:r>
                     </a:p>
                   </a:txBody>
@@ -7749,7 +7749,7 @@
                         </a:defRPr>
                       </a:pPr>
                       <a:r>
-                        <a:t>6.2 req/s</a:t>
+                        <a:t>30.9 req/s</a:t>
                       </a:r>
                     </a:p>
                   </a:txBody>
@@ -7827,7 +7827,7 @@
                         </a:defRPr>
                       </a:pPr>
                       <a:r>
-                        <a:t>17.5 req/s</a:t>
+                        <a:t>24.6 req/s</a:t>
                       </a:r>
                     </a:p>
                   </a:txBody>
@@ -7905,7 +7905,7 @@
                         </a:defRPr>
                       </a:pPr>
                       <a:r>
-                        <a:t>30.1 req/s</a:t>
+                        <a:t>23.6 req/s</a:t>
                       </a:r>
                     </a:p>
                   </a:txBody>
@@ -8454,7 +8454,7 @@
               </a:defRPr>
             </a:pPr>
             <a:r>
-              <a:t>+12%</a:t>
+              <a:t>-11%</a:t>
             </a:r>
           </a:p>
           <a:p>
@@ -8518,7 +8518,7 @@
               </a:defRPr>
             </a:pPr>
             <a:r>
-              <a:t>+75%</a:t>
+              <a:t>-12%</a:t>
             </a:r>
           </a:p>
           <a:p>
@@ -9093,26 +9093,26 @@
                         </a:defRPr>
                       </a:pPr>
                       <a:r>
-                        <a:t>16.5 req/s</a:t>
-                      </a:r>
-                    </a:p>
-                  </a:txBody>
-                  <a:tcPr/>
-                </a:tc>
-                <a:tc>
-                  <a:txBody>
-                    <a:bodyPr/>
-                    <a:lstStyle/>
-                    <a:p>
-                      <a:pPr>
-                        <a:defRPr sz="1000" b="0">
-                          <a:solidFill>
-                            <a:srgbClr val="151515"/>
-                          </a:solidFill>
-                        </a:defRPr>
-                      </a:pPr>
-                      <a:r>
-                        <a:t>18.4 req/s</a:t>
+                        <a:t>28.7 req/s</a:t>
+                      </a:r>
+                    </a:p>
+                  </a:txBody>
+                  <a:tcPr/>
+                </a:tc>
+                <a:tc>
+                  <a:txBody>
+                    <a:bodyPr/>
+                    <a:lstStyle/>
+                    <a:p>
+                      <a:pPr>
+                        <a:defRPr sz="1000" b="0">
+                          <a:solidFill>
+                            <a:srgbClr val="151515"/>
+                          </a:solidFill>
+                        </a:defRPr>
+                      </a:pPr>
+                      <a:r>
+                        <a:t>25.6 req/s</a:t>
                       </a:r>
                     </a:p>
                   </a:txBody>
@@ -9131,26 +9131,26 @@
                         </a:defRPr>
                       </a:pPr>
                       <a:r>
-                        <a:t>+11.5%</a:t>
-                      </a:r>
-                    </a:p>
-                  </a:txBody>
-                  <a:tcPr/>
-                </a:tc>
-                <a:tc>
-                  <a:txBody>
-                    <a:bodyPr/>
-                    <a:lstStyle/>
-                    <a:p>
-                      <a:pPr>
-                        <a:defRPr sz="1000" b="0">
-                          <a:solidFill>
-                            <a:srgbClr val="151515"/>
-                          </a:solidFill>
-                        </a:defRPr>
-                      </a:pPr>
-                      <a:r>
-                        <a:t>28.8 req/s</a:t>
+                        <a:t>-11%</a:t>
+                      </a:r>
+                    </a:p>
+                  </a:txBody>
+                  <a:tcPr/>
+                </a:tc>
+                <a:tc>
+                  <a:txBody>
+                    <a:bodyPr/>
+                    <a:lstStyle/>
+                    <a:p>
+                      <a:pPr>
+                        <a:defRPr sz="1000" b="0">
+                          <a:solidFill>
+                            <a:srgbClr val="151515"/>
+                          </a:solidFill>
+                        </a:defRPr>
+                      </a:pPr>
+                      <a:r>
+                        <a:t>25.2 req/s</a:t>
                       </a:r>
                     </a:p>
                   </a:txBody>
@@ -9169,7 +9169,7 @@
                         </a:defRPr>
                       </a:pPr>
                       <a:r>
-                        <a:t>+74.5%</a:t>
+                        <a:t>-12%</a:t>
                       </a:r>
                     </a:p>
                   </a:txBody>
@@ -10285,26 +10285,26 @@
                         </a:defRPr>
                       </a:pPr>
                       <a:r>
-                        <a:t>11.6 req/s</a:t>
-                      </a:r>
-                    </a:p>
-                  </a:txBody>
-                  <a:tcPr/>
-                </a:tc>
-                <a:tc>
-                  <a:txBody>
-                    <a:bodyPr/>
-                    <a:lstStyle/>
-                    <a:p>
-                      <a:pPr>
-                        <a:defRPr sz="1000" b="0">
-                          <a:solidFill>
-                            <a:srgbClr val="151515"/>
-                          </a:solidFill>
-                        </a:defRPr>
-                      </a:pPr>
-                      <a:r>
-                        <a:t>11.8 req/s</a:t>
+                        <a:t>26.5 req/s</a:t>
+                      </a:r>
+                    </a:p>
+                  </a:txBody>
+                  <a:tcPr/>
+                </a:tc>
+                <a:tc>
+                  <a:txBody>
+                    <a:bodyPr/>
+                    <a:lstStyle/>
+                    <a:p>
+                      <a:pPr>
+                        <a:defRPr sz="1000" b="0">
+                          <a:solidFill>
+                            <a:srgbClr val="151515"/>
+                          </a:solidFill>
+                        </a:defRPr>
+                      </a:pPr>
+                      <a:r>
+                        <a:t>26.5 req/s</a:t>
                       </a:r>
                     </a:p>
                   </a:txBody>
@@ -10323,26 +10323,26 @@
                         </a:defRPr>
                       </a:pPr>
                       <a:r>
-                        <a:t>+1.7%</a:t>
-                      </a:r>
-                    </a:p>
-                  </a:txBody>
-                  <a:tcPr/>
-                </a:tc>
-                <a:tc>
-                  <a:txBody>
-                    <a:bodyPr/>
-                    <a:lstStyle/>
-                    <a:p>
-                      <a:pPr>
-                        <a:defRPr sz="1000" b="0">
-                          <a:solidFill>
-                            <a:srgbClr val="151515"/>
-                          </a:solidFill>
-                        </a:defRPr>
-                      </a:pPr>
-                      <a:r>
-                        <a:t>18.7 req/s</a:t>
+                        <a:t>+0.1%</a:t>
+                      </a:r>
+                    </a:p>
+                  </a:txBody>
+                  <a:tcPr/>
+                </a:tc>
+                <a:tc>
+                  <a:txBody>
+                    <a:bodyPr/>
+                    <a:lstStyle/>
+                    <a:p>
+                      <a:pPr>
+                        <a:defRPr sz="1000" b="0">
+                          <a:solidFill>
+                            <a:srgbClr val="151515"/>
+                          </a:solidFill>
+                        </a:defRPr>
+                      </a:pPr>
+                      <a:r>
+                        <a:t>26.2 req/s</a:t>
                       </a:r>
                     </a:p>
                   </a:txBody>
@@ -10361,7 +10361,7 @@
                         </a:defRPr>
                       </a:pPr>
                       <a:r>
-                        <a:t>+61.2%</a:t>
+                        <a:t>-1%</a:t>
                       </a:r>
                     </a:p>
                   </a:txBody>
@@ -10401,26 +10401,26 @@
                         </a:defRPr>
                       </a:pPr>
                       <a:r>
-                        <a:t>8.7 req/s</a:t>
-                      </a:r>
-                    </a:p>
-                  </a:txBody>
-                  <a:tcPr/>
-                </a:tc>
-                <a:tc>
-                  <a:txBody>
-                    <a:bodyPr/>
-                    <a:lstStyle/>
-                    <a:p>
-                      <a:pPr>
-                        <a:defRPr sz="1000" b="0">
-                          <a:solidFill>
-                            <a:srgbClr val="151515"/>
-                          </a:solidFill>
-                        </a:defRPr>
-                      </a:pPr>
-                      <a:r>
-                        <a:t>6.1 req/s</a:t>
+                        <a:t>28.0 req/s</a:t>
+                      </a:r>
+                    </a:p>
+                  </a:txBody>
+                  <a:tcPr/>
+                </a:tc>
+                <a:tc>
+                  <a:txBody>
+                    <a:bodyPr/>
+                    <a:lstStyle/>
+                    <a:p>
+                      <a:pPr>
+                        <a:defRPr sz="1000" b="0">
+                          <a:solidFill>
+                            <a:srgbClr val="151515"/>
+                          </a:solidFill>
+                        </a:defRPr>
+                      </a:pPr>
+                      <a:r>
+                        <a:t>26.4 req/s</a:t>
                       </a:r>
                     </a:p>
                   </a:txBody>
@@ -10439,26 +10439,26 @@
                         </a:defRPr>
                       </a:pPr>
                       <a:r>
-                        <a:t>-29.9%</a:t>
-                      </a:r>
-                    </a:p>
-                  </a:txBody>
-                  <a:tcPr/>
-                </a:tc>
-                <a:tc>
-                  <a:txBody>
-                    <a:bodyPr/>
-                    <a:lstStyle/>
-                    <a:p>
-                      <a:pPr>
-                        <a:defRPr sz="1000" b="0">
-                          <a:solidFill>
-                            <a:srgbClr val="151515"/>
-                          </a:solidFill>
-                        </a:defRPr>
-                      </a:pPr>
-                      <a:r>
-                        <a:t>19.1 req/s</a:t>
+                        <a:t>-6%</a:t>
+                      </a:r>
+                    </a:p>
+                  </a:txBody>
+                  <a:tcPr/>
+                </a:tc>
+                <a:tc>
+                  <a:txBody>
+                    <a:bodyPr/>
+                    <a:lstStyle/>
+                    <a:p>
+                      <a:pPr>
+                        <a:defRPr sz="1000" b="0">
+                          <a:solidFill>
+                            <a:srgbClr val="151515"/>
+                          </a:solidFill>
+                        </a:defRPr>
+                      </a:pPr>
+                      <a:r>
+                        <a:t>26.0 req/s</a:t>
                       </a:r>
                     </a:p>
                   </a:txBody>
@@ -10477,7 +10477,7 @@
                         </a:defRPr>
                       </a:pPr>
                       <a:r>
-                        <a:t>+119.5%</a:t>
+                        <a:t>-7%</a:t>
                       </a:r>
                     </a:p>
                   </a:txBody>
@@ -10517,26 +10517,26 @@
                         </a:defRPr>
                       </a:pPr>
                       <a:r>
-                        <a:t>8.7 req/s</a:t>
-                      </a:r>
-                    </a:p>
-                  </a:txBody>
-                  <a:tcPr/>
-                </a:tc>
-                <a:tc>
-                  <a:txBody>
-                    <a:bodyPr/>
-                    <a:lstStyle/>
-                    <a:p>
-                      <a:pPr>
-                        <a:defRPr sz="1000" b="0">
-                          <a:solidFill>
-                            <a:srgbClr val="151515"/>
-                          </a:solidFill>
-                        </a:defRPr>
-                      </a:pPr>
-                      <a:r>
-                        <a:t>3.1 req/s</a:t>
+                        <a:t>26.8 req/s</a:t>
+                      </a:r>
+                    </a:p>
+                  </a:txBody>
+                  <a:tcPr/>
+                </a:tc>
+                <a:tc>
+                  <a:txBody>
+                    <a:bodyPr/>
+                    <a:lstStyle/>
+                    <a:p>
+                      <a:pPr>
+                        <a:defRPr sz="1000" b="0">
+                          <a:solidFill>
+                            <a:srgbClr val="151515"/>
+                          </a:solidFill>
+                        </a:defRPr>
+                      </a:pPr>
+                      <a:r>
+                        <a:t>27.0 req/s</a:t>
                       </a:r>
                     </a:p>
                   </a:txBody>
@@ -10555,26 +10555,26 @@
                         </a:defRPr>
                       </a:pPr>
                       <a:r>
-                        <a:t>-64.4%</a:t>
-                      </a:r>
-                    </a:p>
-                  </a:txBody>
-                  <a:tcPr/>
-                </a:tc>
-                <a:tc>
-                  <a:txBody>
-                    <a:bodyPr/>
-                    <a:lstStyle/>
-                    <a:p>
-                      <a:pPr>
-                        <a:defRPr sz="1000" b="0">
-                          <a:solidFill>
-                            <a:srgbClr val="151515"/>
-                          </a:solidFill>
-                        </a:defRPr>
-                      </a:pPr>
-                      <a:r>
-                        <a:t>21.1 req/s</a:t>
+                        <a:t>+1%</a:t>
+                      </a:r>
+                    </a:p>
+                  </a:txBody>
+                  <a:tcPr/>
+                </a:tc>
+                <a:tc>
+                  <a:txBody>
+                    <a:bodyPr/>
+                    <a:lstStyle/>
+                    <a:p>
+                      <a:pPr>
+                        <a:defRPr sz="1000" b="0">
+                          <a:solidFill>
+                            <a:srgbClr val="151515"/>
+                          </a:solidFill>
+                        </a:defRPr>
+                      </a:pPr>
+                      <a:r>
+                        <a:t>26.9 req/s</a:t>
                       </a:r>
                     </a:p>
                   </a:txBody>
@@ -10593,7 +10593,7 @@
                         </a:defRPr>
                       </a:pPr>
                       <a:r>
-                        <a:t>+142.5%</a:t>
+                        <a:t>+0.4%</a:t>
                       </a:r>
                     </a:p>
                   </a:txBody>
@@ -11064,7 +11064,7 @@
               </a:defRPr>
             </a:pPr>
             <a:r>
-              <a:t>28.8 req/s</a:t>
+              <a:t>22.5 req/s</a:t>
             </a:r>
           </a:p>
           <a:p>
@@ -11128,7 +11128,7 @@
               </a:defRPr>
             </a:pPr>
             <a:r>
-              <a:t>+75%</a:t>
+              <a:t>-12%</a:t>
             </a:r>
           </a:p>
           <a:p>
@@ -11353,7 +11353,7 @@
                         </a:defRPr>
                       </a:pPr>
                       <a:r>
-                        <a:t>18.8 req/s</a:t>
+                        <a:t>27.0 req/s</a:t>
                       </a:r>
                     </a:p>
                   </a:txBody>
@@ -11431,7 +11431,7 @@
                         </a:defRPr>
                       </a:pPr>
                       <a:r>
-                        <a:t>18.4 req/s</a:t>
+                        <a:t>25.6 req/s</a:t>
                       </a:r>
                     </a:p>
                   </a:txBody>
@@ -11509,7 +11509,7 @@
                         </a:defRPr>
                       </a:pPr>
                       <a:r>
-                        <a:t>28.8 req/s</a:t>
+                        <a:t>22.5 req/s</a:t>
                       </a:r>
                     </a:p>
                   </a:txBody>
@@ -11728,7 +11728,7 @@
                         </a:defRPr>
                       </a:pPr>
                       <a:r>
-                        <a:t>8.7 req/s</a:t>
+                        <a:t>26.8 req/s</a:t>
                       </a:r>
                     </a:p>
                   </a:txBody>
@@ -11806,7 +11806,7 @@
                         </a:defRPr>
                       </a:pPr>
                       <a:r>
-                        <a:t>3.1 req/s</a:t>
+                        <a:t>27.0 req/s</a:t>
                       </a:r>
                     </a:p>
                   </a:txBody>
@@ -11884,7 +11884,7 @@
                         </a:defRPr>
                       </a:pPr>
                       <a:r>
-                        <a:t>21.1 req/s</a:t>
+                        <a:t>26.9 req/s</a:t>
                       </a:r>
                     </a:p>
                   </a:txBody>

--- a/docs/regression-slides.pptx
+++ b/docs/regression-slides.pptx
@@ -5371,7 +5371,7 @@
                   <a:srgbClr val="92400E"/>
                 </a:solidFill>
               </a:rPr>
-              <a:t>RHAIIS 3.4 delivers a clear improvement on PD: 23% lower TTFT and 57% higher throughput on the exact same configuration. Inter-token latency also dropped 35%, meaning faster streaming for end users. Tuning pushes further — 39% lower TTFT and lower TTFT — by optimizing gpu_memory_utilization (0.95 vs 0.90), max_num_seqs (192 vs 256), and EPP routing weights (cache_optimized 5:1:2).</a:t>
+              <a:t>RHAIIS 3.4 delivers a clear improvement on PD: 23% lower TTFT on the exact same configuration. Inter-token latency also dropped 35%, meaning faster streaming for end users. Throughput (req/s) is roughly flat because the system is saturated at 100 concurrent users. Tuning pushes TTFT further to -39% by optimizing gpu_memory_utilization (0.95 vs 0.90), max_num_seqs (192 vs 256), and EPP routing weights (cache_optimized 5:1:2).</a:t>
             </a:r>
           </a:p>
         </p:txBody>
@@ -9350,7 +9350,7 @@
                   <a:srgbClr val="92400E"/>
                 </a:solidFill>
               </a:rPr>
-              <a:t>PD shows moderate improvement in 3.4: 10% lower TTFT P90 and 25% lower P99 on the same config. ITL dropped 25%, indicating faster decode. Tuning adds significant gains at P50 and P90 (-34%) with 75% more throughput. Note: P99 regressed with tuning due to occasional tail latency spikes at higher utilization — a tradeoff of pushing gpu_memory_utilization from 0.90 to 0.95.</a:t>
+              <a:t>PD shows moderate improvement in 3.4: 10% lower TTFT P90 and 25% lower P99 on the same config. ITL dropped 25%, indicating faster decode. Tuning adds significant gains at P50 and P90 (-34%). Throughput stays roughly flat (~26 req/s) across versions as the system is concurrency-limited at 100 users. Note: P99 regressed with tuning (+8.6%) due to tail latency spikes at higher gpu_memory_utilization (0.95 vs 0.90).</a:t>
             </a:r>
           </a:p>
         </p:txBody>
@@ -13145,7 +13145,7 @@
                   <a:srgbClr val="166534"/>
                 </a:solidFill>
               </a:rPr>
-              <a:t>RHAIIS 3.4 is not a uniform improvement — PD consistently benefits, but aggregated depends on model and TP. For production deployments upgrading from 3.3 to 3.4, re-running configuration optimization is recommended. With tuning, all configurations exceed the 3.3 baseline by 34-56%.</a:t>
+              <a:t>RHAIIS 3.4 is not a uniform improvement — PD consistently benefits, but aggregated depends on model and TP. For production deployments upgrading from 3.3 to 3.4, re-running configuration optimization is recommended. With tuning, all configurations exceed the 3.3 TTFT baseline by 34-83%. Throughput (req/s) is roughly constant across configs and versions — the real gain is latency.</a:t>
             </a:r>
           </a:p>
         </p:txBody>

--- a/docs/regression-slides.pptx
+++ b/docs/regression-slides.pptx
@@ -5772,7 +5772,7 @@
                         </a:defRPr>
                       </a:pPr>
                       <a:r>
-                        <a:t>vs 3.3</a:t>
+                        <a:t>vs 3.4</a:t>
                       </a:r>
                     </a:p>
                   </a:txBody>
@@ -5888,7 +5888,7 @@
                         </a:defRPr>
                       </a:pPr>
                       <a:r>
-                        <a:t>-55.5%</a:t>
+                        <a:t>-54.9%</a:t>
                       </a:r>
                     </a:p>
                   </a:txBody>
@@ -6004,7 +6004,7 @@
                         </a:defRPr>
                       </a:pPr>
                       <a:r>
-                        <a:t>-41.5%</a:t>
+                        <a:t>-20.3%</a:t>
                       </a:r>
                     </a:p>
                   </a:txBody>
@@ -6120,7 +6120,7 @@
                         </a:defRPr>
                       </a:pPr>
                       <a:r>
-                        <a:t>-83.5%</a:t>
+                        <a:t>-80.7%</a:t>
                       </a:r>
                     </a:p>
                   </a:txBody>
@@ -6266,7 +6266,7 @@
                         </a:defRPr>
                       </a:pPr>
                       <a:r>
-                        <a:t>vs 3.3</a:t>
+                        <a:t>vs 3.4</a:t>
                       </a:r>
                     </a:p>
                   </a:txBody>
@@ -6382,7 +6382,7 @@
                         </a:defRPr>
                       </a:pPr>
                       <a:r>
-                        <a:t>-26%</a:t>
+                        <a:t>-4.2%</a:t>
                       </a:r>
                     </a:p>
                   </a:txBody>
@@ -6498,7 +6498,7 @@
                         </a:defRPr>
                       </a:pPr>
                       <a:r>
-                        <a:t>-21%</a:t>
+                        <a:t>+0.4%</a:t>
                       </a:r>
                     </a:p>
                   </a:txBody>
@@ -6614,7 +6614,7 @@
                         </a:defRPr>
                       </a:pPr>
                       <a:r>
-                        <a:t>-10%</a:t>
+                        <a:t>-4.5%</a:t>
                       </a:r>
                     </a:p>
                   </a:txBody>
@@ -9751,7 +9751,7 @@
                         </a:defRPr>
                       </a:pPr>
                       <a:r>
-                        <a:t>vs 3.3</a:t>
+                        <a:t>vs 3.4</a:t>
                       </a:r>
                     </a:p>
                   </a:txBody>
@@ -9867,7 +9867,7 @@
                         </a:defRPr>
                       </a:pPr>
                       <a:r>
-                        <a:t>-36.8%</a:t>
+                        <a:t>-18.3%</a:t>
                       </a:r>
                     </a:p>
                   </a:txBody>
@@ -9983,7 +9983,7 @@
                         </a:defRPr>
                       </a:pPr>
                       <a:r>
-                        <a:t>-50.7%</a:t>
+                        <a:t>-53.2%</a:t>
                       </a:r>
                     </a:p>
                   </a:txBody>
@@ -10099,7 +10099,7 @@
                         </a:defRPr>
                       </a:pPr>
                       <a:r>
-                        <a:t>-44.3%</a:t>
+                        <a:t>-64.2%</a:t>
                       </a:r>
                     </a:p>
                   </a:txBody>
@@ -10245,7 +10245,7 @@
                         </a:defRPr>
                       </a:pPr>
                       <a:r>
-                        <a:t>vs 3.3</a:t>
+                        <a:t>vs 3.4</a:t>
                       </a:r>
                     </a:p>
                   </a:txBody>
@@ -10361,7 +10361,7 @@
                         </a:defRPr>
                       </a:pPr>
                       <a:r>
-                        <a:t>-1%</a:t>
+                        <a:t>-1.1%</a:t>
                       </a:r>
                     </a:p>
                   </a:txBody>
@@ -10477,7 +10477,7 @@
                         </a:defRPr>
                       </a:pPr>
                       <a:r>
-                        <a:t>-7%</a:t>
+                        <a:t>-1.5%</a:t>
                       </a:r>
                     </a:p>
                   </a:txBody>
@@ -10593,7 +10593,7 @@
                         </a:defRPr>
                       </a:pPr>
                       <a:r>
-                        <a:t>+0.4%</a:t>
+                        <a:t>-0.4%</a:t>
                       </a:r>
                     </a:p>
                   </a:txBody>

--- a/docs/regression-slides.pptx
+++ b/docs/regression-slides.pptx
@@ -4726,7 +4726,7 @@
                         </a:defRPr>
                       </a:pPr>
                       <a:r>
-                        <a:t>3.3 vs Tuned</a:t>
+                        <a:t>3.4 vs Tuned</a:t>
                       </a:r>
                     </a:p>
                   </a:txBody>
@@ -8705,7 +8705,7 @@
                         </a:defRPr>
                       </a:pPr>
                       <a:r>
-                        <a:t>3.3 vs Tuned</a:t>
+                        <a:t>3.4 vs Tuned</a:t>
                       </a:r>
                     </a:p>
                   </a:txBody>
@@ -12315,7 +12315,7 @@
                         </a:defRPr>
                       </a:pPr>
                       <a:r>
-                        <a:t>3.3 vs Tuned</a:t>
+                        <a:t>3.4 vs Tuned</a:t>
                       </a:r>
                     </a:p>
                   </a:txBody>

--- a/docs/regression-slides.pptx
+++ b/docs/regression-slides.pptx
@@ -4842,7 +4842,7 @@
                         </a:defRPr>
                       </a:pPr>
                       <a:r>
-                        <a:t>-41.9%</a:t>
+                        <a:t>-39.4%</a:t>
                       </a:r>
                     </a:p>
                   </a:txBody>
@@ -4958,7 +4958,7 @@
                         </a:defRPr>
                       </a:pPr>
                       <a:r>
-                        <a:t>-39.3%</a:t>
+                        <a:t>-20.9%</a:t>
                       </a:r>
                     </a:p>
                   </a:txBody>
@@ -5074,7 +5074,7 @@
                         </a:defRPr>
                       </a:pPr>
                       <a:r>
-                        <a:t>-37.6%</a:t>
+                        <a:t>-19.9%</a:t>
                       </a:r>
                     </a:p>
                   </a:txBody>
@@ -5190,7 +5190,7 @@
                         </a:defRPr>
                       </a:pPr>
                       <a:r>
-                        <a:t>-28%</a:t>
+                        <a:t>+0.4%</a:t>
                       </a:r>
                     </a:p>
                   </a:txBody>
@@ -5306,7 +5306,7 @@
                         </a:defRPr>
                       </a:pPr>
                       <a:r>
-                        <a:t>-33.9%</a:t>
+                        <a:t>+1.7%</a:t>
                       </a:r>
                     </a:p>
                   </a:txBody>
@@ -6679,7 +6679,7 @@
                   <a:srgbClr val="92400E"/>
                 </a:solidFill>
               </a:rPr>
-              <a:t>All aggregated configurations improved in 3.4, with the largest gains at TP2 (-27% TTFT). However, the optimal TP shifted between versions: 3.3's best was 4xTP4, 3.4's best was 8xTP2, and tuned 3.4's best was 2xTP8. Tuning found that TP8 with higher gpu_memory_utilization (0.95) and cache-optimized EPP delivers 83% lower TTFT than the 3.3 baseline — but only with tuning. Without it, TP8 was the worst aggregated option in both versions.</a:t>
+              <a:t>All aggregated configurations improved in 3.4, with the largest gains at TP2 (-27% TTFT). However, the optimal TP shifted between versions: 3.3's best was 4xTP4, 3.4's best was 8xTP2, and tuned 3.4's best was 2xTP8. Tuning found that TP8 with higher gpu_memory_utilization (0.95) and cache-optimized EPP delivers 81% lower TTFT than the 3.4 baseline — but only with tuning. Without it, TP8 was the worst aggregated option in both versions.</a:t>
             </a:r>
           </a:p>
         </p:txBody>
@@ -7983,7 +7983,7 @@
                         </a:defRPr>
                       </a:pPr>
                       <a:r>
-                        <a:t>32.0 req/s</a:t>
+                        <a:t>23.5 req/s</a:t>
                       </a:r>
                     </a:p>
                   </a:txBody>
@@ -8821,7 +8821,7 @@
                         </a:defRPr>
                       </a:pPr>
                       <a:r>
-                        <a:t>-21.2%</a:t>
+                        <a:t>-35.5%</a:t>
                       </a:r>
                     </a:p>
                   </a:txBody>
@@ -8937,7 +8937,7 @@
                         </a:defRPr>
                       </a:pPr>
                       <a:r>
-                        <a:t>-33.7%</a:t>
+                        <a:t>-26.4%</a:t>
                       </a:r>
                     </a:p>
                   </a:txBody>
@@ -9053,7 +9053,7 @@
                         </a:defRPr>
                       </a:pPr>
                       <a:r>
-                        <a:t>+8.6%</a:t>
+                        <a:t>+45.4%</a:t>
                       </a:r>
                     </a:p>
                   </a:txBody>
@@ -9169,7 +9169,7 @@
                         </a:defRPr>
                       </a:pPr>
                       <a:r>
-                        <a:t>-12%</a:t>
+                        <a:t>-1.6%</a:t>
                       </a:r>
                     </a:p>
                   </a:txBody>
@@ -9285,7 +9285,7 @@
                         </a:defRPr>
                       </a:pPr>
                       <a:r>
-                        <a:t>-23.8%</a:t>
+                        <a:t>+1.1%</a:t>
                       </a:r>
                     </a:p>
                   </a:txBody>
@@ -10658,7 +10658,7 @@
                   <a:srgbClr val="92400E"/>
                 </a:solidFill>
               </a:rPr>
-              <a:t>RHAIIS 3.4 regresses aggregated performance at high TP for Llama-70B: TP8 is 55% slower and TP4 is 5% slower. Only TP2 improved (-23%). This regression appears specific to large FP8 models at high tensor parallelism — Qwen3-32B did not show this behavior. Tuning fully recovers the regression and exceeds the 3.3 baseline: TP8 goes from 831ms (3.3) to 1,292ms (3.4 regression) to 463ms (3.4 tuned, -44% vs 3.3).</a:t>
+              <a:t>RHAIIS 3.4 regresses aggregated performance at high TP for Llama-70B: TP8 is 55% slower and TP4 is 5% slower. Only TP2 improved (-23%). This regression appears specific to large FP8 models at high tensor parallelism — Qwen3-32B did not show this behavior. Tuning fully recovers the regression and exceeds the 3.3 baseline: TP8 goes from 831ms (3.3) to 1,292ms (3.4 regression) to 463ms (3.4 tuned, -64% vs 3.4).</a:t>
             </a:r>
           </a:p>
         </p:txBody>
@@ -12431,7 +12431,7 @@
                         </a:defRPr>
                       </a:pPr>
                       <a:r>
-                        <a:t>-39%</a:t>
+                        <a:t>-21%</a:t>
                       </a:r>
                     </a:p>
                   </a:txBody>
@@ -12547,7 +12547,7 @@
                         </a:defRPr>
                       </a:pPr>
                       <a:r>
-                        <a:t>-56%</a:t>
+                        <a:t>-55%</a:t>
                       </a:r>
                     </a:p>
                   </a:txBody>
@@ -12663,7 +12663,7 @@
                         </a:defRPr>
                       </a:pPr>
                       <a:r>
-                        <a:t>-34%</a:t>
+                        <a:t>-26%</a:t>
                       </a:r>
                     </a:p>
                   </a:txBody>
@@ -12779,7 +12779,7 @@
                         </a:defRPr>
                       </a:pPr>
                       <a:r>
-                        <a:t>-44%</a:t>
+                        <a:t>-64%</a:t>
                       </a:r>
                     </a:p>
                   </a:txBody>

--- a/docs/regression-slides.pptx
+++ b/docs/regression-slides.pptx
@@ -13000,7 +13000,7 @@
                         </a:defRPr>
                       </a:pPr>
                       <a:r>
-                        <a:t>Llama TP8 regression (+55%) fully recovered to -44% below 3.3 baseline</a:t>
+                        <a:t>Llama TP8 regression (+55%) fully recovered to -64% vs 3.4 default (463ms vs 1,292ms)</a:t>
                       </a:r>
                     </a:p>
                   </a:txBody>
@@ -13021,7 +13021,7 @@
                         </a:defRPr>
                       </a:pPr>
                       <a:r>
-                        <a:t>Tuning adds 34-56% on top</a:t>
+                        <a:t>Tuning adds 21-64% on top</a:t>
                       </a:r>
                     </a:p>
                   </a:txBody>
@@ -13145,7 +13145,7 @@
                   <a:srgbClr val="166534"/>
                 </a:solidFill>
               </a:rPr>
-              <a:t>RHAIIS 3.4 is not a uniform improvement — PD consistently benefits, but aggregated depends on model and TP. For production deployments upgrading from 3.3 to 3.4, re-running configuration optimization is recommended. With tuning, all configurations exceed the 3.3 TTFT baseline by 34-83%. Throughput (req/s) is roughly constant across configs and versions — the real gain is latency.</a:t>
+              <a:t>RHAIIS 3.4 is not a uniform improvement — PD consistently benefits, but aggregated depends on model and TP. For production deployments upgrading from 3.3 to 3.4, re-running configuration optimization is recommended. With tuning, all configurations exceed the 3.3 TTFT baseline by 21-64%. Throughput (req/s) is roughly constant across configs and versions — the real gain is latency.</a:t>
             </a:r>
           </a:p>
         </p:txBody>

--- a/docs/regression-slides.pptx
+++ b/docs/regression-slides.pptx
@@ -11509,7 +11509,7 @@
                         </a:defRPr>
                       </a:pPr>
                       <a:r>
-                        <a:t>22.5 req/s</a:t>
+                        <a:t>25.2 req/s</a:t>
                       </a:r>
                     </a:p>
                   </a:txBody>

--- a/docs/regression-slides.pptx
+++ b/docs/regression-slides.pptx
@@ -4804,6 +4804,11 @@
                         </a:defRPr>
                       </a:pPr>
                       <a:r>
+                        <a:rPr>
+                          <a:solidFill>
+                            <a:srgbClr val="065F46"/>
+                          </a:solidFill>
+                        </a:rPr>
                         <a:t>-4.1%</a:t>
                       </a:r>
                     </a:p>
@@ -4842,6 +4847,11 @@
                         </a:defRPr>
                       </a:pPr>
                       <a:r>
+                        <a:rPr>
+                          <a:solidFill>
+                            <a:srgbClr val="065F46"/>
+                          </a:solidFill>
+                        </a:rPr>
                         <a:t>-39.4%</a:t>
                       </a:r>
                     </a:p>
@@ -4920,6 +4930,11 @@
                         </a:defRPr>
                       </a:pPr>
                       <a:r>
+                        <a:rPr>
+                          <a:solidFill>
+                            <a:srgbClr val="065F46"/>
+                          </a:solidFill>
+                        </a:rPr>
                         <a:t>-23.3%</a:t>
                       </a:r>
                     </a:p>
@@ -4958,6 +4973,11 @@
                         </a:defRPr>
                       </a:pPr>
                       <a:r>
+                        <a:rPr>
+                          <a:solidFill>
+                            <a:srgbClr val="065F46"/>
+                          </a:solidFill>
+                        </a:rPr>
                         <a:t>-20.9%</a:t>
                       </a:r>
                     </a:p>
@@ -5036,6 +5056,11 @@
                         </a:defRPr>
                       </a:pPr>
                       <a:r>
+                        <a:rPr>
+                          <a:solidFill>
+                            <a:srgbClr val="065F46"/>
+                          </a:solidFill>
+                        </a:rPr>
                         <a:t>-22.1%</a:t>
                       </a:r>
                     </a:p>
@@ -5074,6 +5099,11 @@
                         </a:defRPr>
                       </a:pPr>
                       <a:r>
+                        <a:rPr>
+                          <a:solidFill>
+                            <a:srgbClr val="065F46"/>
+                          </a:solidFill>
+                        </a:rPr>
                         <a:t>-19.9%</a:t>
                       </a:r>
                     </a:p>
@@ -5152,6 +5182,11 @@
                         </a:defRPr>
                       </a:pPr>
                       <a:r>
+                        <a:rPr>
+                          <a:solidFill>
+                            <a:srgbClr val="991B1B"/>
+                          </a:solidFill>
+                        </a:rPr>
                         <a:t>-28%</a:t>
                       </a:r>
                     </a:p>
@@ -5190,6 +5225,11 @@
                         </a:defRPr>
                       </a:pPr>
                       <a:r>
+                        <a:rPr>
+                          <a:solidFill>
+                            <a:srgbClr val="065F46"/>
+                          </a:solidFill>
+                        </a:rPr>
                         <a:t>+0.4%</a:t>
                       </a:r>
                     </a:p>
@@ -5268,6 +5308,11 @@
                         </a:defRPr>
                       </a:pPr>
                       <a:r>
+                        <a:rPr>
+                          <a:solidFill>
+                            <a:srgbClr val="065F46"/>
+                          </a:solidFill>
+                        </a:rPr>
                         <a:t>-34.9%</a:t>
                       </a:r>
                     </a:p>
@@ -5306,6 +5351,11 @@
                         </a:defRPr>
                       </a:pPr>
                       <a:r>
+                        <a:rPr>
+                          <a:solidFill>
+                            <a:srgbClr val="991B1B"/>
+                          </a:solidFill>
+                        </a:rPr>
                         <a:t>+1.7%</a:t>
                       </a:r>
                     </a:p>
@@ -5850,6 +5900,11 @@
                         </a:defRPr>
                       </a:pPr>
                       <a:r>
+                        <a:rPr>
+                          <a:solidFill>
+                            <a:srgbClr val="065F46"/>
+                          </a:solidFill>
+                        </a:rPr>
                         <a:t>-1.3%</a:t>
                       </a:r>
                     </a:p>
@@ -5888,6 +5943,11 @@
                         </a:defRPr>
                       </a:pPr>
                       <a:r>
+                        <a:rPr>
+                          <a:solidFill>
+                            <a:srgbClr val="065F46"/>
+                          </a:solidFill>
+                        </a:rPr>
                         <a:t>-54.9%</a:t>
                       </a:r>
                     </a:p>
@@ -5966,6 +6026,11 @@
                         </a:defRPr>
                       </a:pPr>
                       <a:r>
+                        <a:rPr>
+                          <a:solidFill>
+                            <a:srgbClr val="065F46"/>
+                          </a:solidFill>
+                        </a:rPr>
                         <a:t>-26.6%</a:t>
                       </a:r>
                     </a:p>
@@ -6004,6 +6069,11 @@
                         </a:defRPr>
                       </a:pPr>
                       <a:r>
+                        <a:rPr>
+                          <a:solidFill>
+                            <a:srgbClr val="065F46"/>
+                          </a:solidFill>
+                        </a:rPr>
                         <a:t>-20.3%</a:t>
                       </a:r>
                     </a:p>
@@ -6082,6 +6152,11 @@
                         </a:defRPr>
                       </a:pPr>
                       <a:r>
+                        <a:rPr>
+                          <a:solidFill>
+                            <a:srgbClr val="065F46"/>
+                          </a:solidFill>
+                        </a:rPr>
                         <a:t>-14.2%</a:t>
                       </a:r>
                     </a:p>
@@ -6120,6 +6195,11 @@
                         </a:defRPr>
                       </a:pPr>
                       <a:r>
+                        <a:rPr>
+                          <a:solidFill>
+                            <a:srgbClr val="065F46"/>
+                          </a:solidFill>
+                        </a:rPr>
                         <a:t>-80.7%</a:t>
                       </a:r>
                     </a:p>
@@ -6344,6 +6424,11 @@
                         </a:defRPr>
                       </a:pPr>
                       <a:r>
+                        <a:rPr>
+                          <a:solidFill>
+                            <a:srgbClr val="991B1B"/>
+                          </a:solidFill>
+                        </a:rPr>
                         <a:t>-23%</a:t>
                       </a:r>
                     </a:p>
@@ -6382,6 +6467,11 @@
                         </a:defRPr>
                       </a:pPr>
                       <a:r>
+                        <a:rPr>
+                          <a:solidFill>
+                            <a:srgbClr val="991B1B"/>
+                          </a:solidFill>
+                        </a:rPr>
                         <a:t>-4.2%</a:t>
                       </a:r>
                     </a:p>
@@ -6460,6 +6550,11 @@
                         </a:defRPr>
                       </a:pPr>
                       <a:r>
+                        <a:rPr>
+                          <a:solidFill>
+                            <a:srgbClr val="991B1B"/>
+                          </a:solidFill>
+                        </a:rPr>
                         <a:t>-21%</a:t>
                       </a:r>
                     </a:p>
@@ -6498,6 +6593,11 @@
                         </a:defRPr>
                       </a:pPr>
                       <a:r>
+                        <a:rPr>
+                          <a:solidFill>
+                            <a:srgbClr val="065F46"/>
+                          </a:solidFill>
+                        </a:rPr>
                         <a:t>+0.4%</a:t>
                       </a:r>
                     </a:p>
@@ -6576,6 +6676,11 @@
                         </a:defRPr>
                       </a:pPr>
                       <a:r>
+                        <a:rPr>
+                          <a:solidFill>
+                            <a:srgbClr val="991B1B"/>
+                          </a:solidFill>
+                        </a:rPr>
                         <a:t>-6%</a:t>
                       </a:r>
                     </a:p>
@@ -6614,6 +6719,11 @@
                         </a:defRPr>
                       </a:pPr>
                       <a:r>
+                        <a:rPr>
+                          <a:solidFill>
+                            <a:srgbClr val="991B1B"/>
+                          </a:solidFill>
+                        </a:rPr>
                         <a:t>-4.5%</a:t>
                       </a:r>
                     </a:p>
@@ -8783,6 +8893,11 @@
                         </a:defRPr>
                       </a:pPr>
                       <a:r>
+                        <a:rPr>
+                          <a:solidFill>
+                            <a:srgbClr val="991B1B"/>
+                          </a:solidFill>
+                        </a:rPr>
                         <a:t>+22.2%</a:t>
                       </a:r>
                     </a:p>
@@ -8821,6 +8936,11 @@
                         </a:defRPr>
                       </a:pPr>
                       <a:r>
+                        <a:rPr>
+                          <a:solidFill>
+                            <a:srgbClr val="065F46"/>
+                          </a:solidFill>
+                        </a:rPr>
                         <a:t>-35.5%</a:t>
                       </a:r>
                     </a:p>
@@ -8899,6 +9019,11 @@
                         </a:defRPr>
                       </a:pPr>
                       <a:r>
+                        <a:rPr>
+                          <a:solidFill>
+                            <a:srgbClr val="065F46"/>
+                          </a:solidFill>
+                        </a:rPr>
                         <a:t>-9.9%</a:t>
                       </a:r>
                     </a:p>
@@ -8937,6 +9062,11 @@
                         </a:defRPr>
                       </a:pPr>
                       <a:r>
+                        <a:rPr>
+                          <a:solidFill>
+                            <a:srgbClr val="065F46"/>
+                          </a:solidFill>
+                        </a:rPr>
                         <a:t>-26.4%</a:t>
                       </a:r>
                     </a:p>
@@ -9015,6 +9145,11 @@
                         </a:defRPr>
                       </a:pPr>
                       <a:r>
+                        <a:rPr>
+                          <a:solidFill>
+                            <a:srgbClr val="065F46"/>
+                          </a:solidFill>
+                        </a:rPr>
                         <a:t>-25.3%</a:t>
                       </a:r>
                     </a:p>
@@ -9053,6 +9188,11 @@
                         </a:defRPr>
                       </a:pPr>
                       <a:r>
+                        <a:rPr>
+                          <a:solidFill>
+                            <a:srgbClr val="991B1B"/>
+                          </a:solidFill>
+                        </a:rPr>
                         <a:t>+45.4%</a:t>
                       </a:r>
                     </a:p>
@@ -9131,6 +9271,11 @@
                         </a:defRPr>
                       </a:pPr>
                       <a:r>
+                        <a:rPr>
+                          <a:solidFill>
+                            <a:srgbClr val="991B1B"/>
+                          </a:solidFill>
+                        </a:rPr>
                         <a:t>-11%</a:t>
                       </a:r>
                     </a:p>
@@ -9169,6 +9314,11 @@
                         </a:defRPr>
                       </a:pPr>
                       <a:r>
+                        <a:rPr>
+                          <a:solidFill>
+                            <a:srgbClr val="991B1B"/>
+                          </a:solidFill>
+                        </a:rPr>
                         <a:t>-1.6%</a:t>
                       </a:r>
                     </a:p>
@@ -9247,6 +9397,11 @@
                         </a:defRPr>
                       </a:pPr>
                       <a:r>
+                        <a:rPr>
+                          <a:solidFill>
+                            <a:srgbClr val="065F46"/>
+                          </a:solidFill>
+                        </a:rPr>
                         <a:t>-24.7%</a:t>
                       </a:r>
                     </a:p>
@@ -9285,6 +9440,11 @@
                         </a:defRPr>
                       </a:pPr>
                       <a:r>
+                        <a:rPr>
+                          <a:solidFill>
+                            <a:srgbClr val="991B1B"/>
+                          </a:solidFill>
+                        </a:rPr>
                         <a:t>+1.1%</a:t>
                       </a:r>
                     </a:p>
@@ -9829,6 +9989,11 @@
                         </a:defRPr>
                       </a:pPr>
                       <a:r>
+                        <a:rPr>
+                          <a:solidFill>
+                            <a:srgbClr val="065F46"/>
+                          </a:solidFill>
+                        </a:rPr>
                         <a:t>-22.6%</a:t>
                       </a:r>
                     </a:p>
@@ -9867,6 +10032,11 @@
                         </a:defRPr>
                       </a:pPr>
                       <a:r>
+                        <a:rPr>
+                          <a:solidFill>
+                            <a:srgbClr val="065F46"/>
+                          </a:solidFill>
+                        </a:rPr>
                         <a:t>-18.3%</a:t>
                       </a:r>
                     </a:p>
@@ -9945,6 +10115,11 @@
                         </a:defRPr>
                       </a:pPr>
                       <a:r>
+                        <a:rPr>
+                          <a:solidFill>
+                            <a:srgbClr val="991B1B"/>
+                          </a:solidFill>
+                        </a:rPr>
                         <a:t>+5.3%</a:t>
                       </a:r>
                     </a:p>
@@ -9983,6 +10158,11 @@
                         </a:defRPr>
                       </a:pPr>
                       <a:r>
+                        <a:rPr>
+                          <a:solidFill>
+                            <a:srgbClr val="065F46"/>
+                          </a:solidFill>
+                        </a:rPr>
                         <a:t>-53.2%</a:t>
                       </a:r>
                     </a:p>
@@ -10061,6 +10241,11 @@
                         </a:defRPr>
                       </a:pPr>
                       <a:r>
+                        <a:rPr>
+                          <a:solidFill>
+                            <a:srgbClr val="991B1B"/>
+                          </a:solidFill>
+                        </a:rPr>
                         <a:t>+55.5%</a:t>
                       </a:r>
                     </a:p>
@@ -10099,6 +10284,11 @@
                         </a:defRPr>
                       </a:pPr>
                       <a:r>
+                        <a:rPr>
+                          <a:solidFill>
+                            <a:srgbClr val="065F46"/>
+                          </a:solidFill>
+                        </a:rPr>
                         <a:t>-64.2%</a:t>
                       </a:r>
                     </a:p>
@@ -10323,6 +10513,11 @@
                         </a:defRPr>
                       </a:pPr>
                       <a:r>
+                        <a:rPr>
+                          <a:solidFill>
+                            <a:srgbClr val="065F46"/>
+                          </a:solidFill>
+                        </a:rPr>
                         <a:t>+0.1%</a:t>
                       </a:r>
                     </a:p>
@@ -10361,6 +10556,11 @@
                         </a:defRPr>
                       </a:pPr>
                       <a:r>
+                        <a:rPr>
+                          <a:solidFill>
+                            <a:srgbClr val="991B1B"/>
+                          </a:solidFill>
+                        </a:rPr>
                         <a:t>-1.1%</a:t>
                       </a:r>
                     </a:p>
@@ -10439,6 +10639,11 @@
                         </a:defRPr>
                       </a:pPr>
                       <a:r>
+                        <a:rPr>
+                          <a:solidFill>
+                            <a:srgbClr val="991B1B"/>
+                          </a:solidFill>
+                        </a:rPr>
                         <a:t>-6%</a:t>
                       </a:r>
                     </a:p>
@@ -10477,6 +10682,11 @@
                         </a:defRPr>
                       </a:pPr>
                       <a:r>
+                        <a:rPr>
+                          <a:solidFill>
+                            <a:srgbClr val="991B1B"/>
+                          </a:solidFill>
+                        </a:rPr>
                         <a:t>-1.5%</a:t>
                       </a:r>
                     </a:p>
@@ -10555,6 +10765,11 @@
                         </a:defRPr>
                       </a:pPr>
                       <a:r>
+                        <a:rPr>
+                          <a:solidFill>
+                            <a:srgbClr val="065F46"/>
+                          </a:solidFill>
+                        </a:rPr>
                         <a:t>+1%</a:t>
                       </a:r>
                     </a:p>
@@ -10593,6 +10808,11 @@
                         </a:defRPr>
                       </a:pPr>
                       <a:r>
+                        <a:rPr>
+                          <a:solidFill>
+                            <a:srgbClr val="991B1B"/>
+                          </a:solidFill>
+                        </a:rPr>
                         <a:t>-0.4%</a:t>
                       </a:r>
                     </a:p>
@@ -12393,6 +12613,11 @@
                         </a:defRPr>
                       </a:pPr>
                       <a:r>
+                        <a:rPr>
+                          <a:solidFill>
+                            <a:srgbClr val="065F46"/>
+                          </a:solidFill>
+                        </a:rPr>
                         <a:t>-23%</a:t>
                       </a:r>
                     </a:p>
@@ -12431,6 +12656,11 @@
                         </a:defRPr>
                       </a:pPr>
                       <a:r>
+                        <a:rPr>
+                          <a:solidFill>
+                            <a:srgbClr val="065F46"/>
+                          </a:solidFill>
+                        </a:rPr>
                         <a:t>-21%</a:t>
                       </a:r>
                     </a:p>
@@ -12509,6 +12739,11 @@
                         </a:defRPr>
                       </a:pPr>
                       <a:r>
+                        <a:rPr>
+                          <a:solidFill>
+                            <a:srgbClr val="065F46"/>
+                          </a:solidFill>
+                        </a:rPr>
                         <a:t>-1%</a:t>
                       </a:r>
                     </a:p>
@@ -12547,6 +12782,11 @@
                         </a:defRPr>
                       </a:pPr>
                       <a:r>
+                        <a:rPr>
+                          <a:solidFill>
+                            <a:srgbClr val="065F46"/>
+                          </a:solidFill>
+                        </a:rPr>
                         <a:t>-55%</a:t>
                       </a:r>
                     </a:p>
@@ -12625,6 +12865,11 @@
                         </a:defRPr>
                       </a:pPr>
                       <a:r>
+                        <a:rPr>
+                          <a:solidFill>
+                            <a:srgbClr val="065F46"/>
+                          </a:solidFill>
+                        </a:rPr>
                         <a:t>-10%</a:t>
                       </a:r>
                     </a:p>
@@ -12663,6 +12908,11 @@
                         </a:defRPr>
                       </a:pPr>
                       <a:r>
+                        <a:rPr>
+                          <a:solidFill>
+                            <a:srgbClr val="065F46"/>
+                          </a:solidFill>
+                        </a:rPr>
                         <a:t>-26%</a:t>
                       </a:r>
                     </a:p>
@@ -12741,6 +12991,11 @@
                         </a:defRPr>
                       </a:pPr>
                       <a:r>
+                        <a:rPr>
+                          <a:solidFill>
+                            <a:srgbClr val="991B1B"/>
+                          </a:solidFill>
+                        </a:rPr>
                         <a:t>+55%</a:t>
                       </a:r>
                     </a:p>
@@ -12779,6 +13034,11 @@
                         </a:defRPr>
                       </a:pPr>
                       <a:r>
+                        <a:rPr>
+                          <a:solidFill>
+                            <a:srgbClr val="065F46"/>
+                          </a:solidFill>
+                        </a:rPr>
                         <a:t>-64%</a:t>
                       </a:r>
                     </a:p>

--- a/docs/regression-slides.pptx
+++ b/docs/regression-slides.pptx
@@ -5421,7 +5421,7 @@
                   <a:srgbClr val="92400E"/>
                 </a:solidFill>
               </a:rPr>
-              <a:t>RHAIIS 3.4 delivers a clear improvement on PD: 23% lower TTFT on the exact same configuration. Inter-token latency also dropped 35%, meaning faster streaming for end users. Throughput (req/s) is roughly flat because the system is saturated at 100 concurrent users. Tuning pushes TTFT further to -39% by optimizing gpu_memory_utilization (0.95 vs 0.90), max_num_seqs (192 vs 256), and EPP routing weights (cache_optimized 5:1:2).</a:t>
+              <a:t>RHAIIS 3.4 delivers a clear improvement on PD: 23% lower TTFT on the exact same configuration. Inter-token latency also dropped 35%, meaning faster streaming for end users. Throughput dropped 28% due to an EPP routing change: v0.6.0 added prefix-cache-scorer (weight 2) alongside queue-scorer (weight 1), prioritizing prefix cache hits over even load distribution. Requests cluster on pods with cached prefixes, improving per-user latency but reducing total throughput. Tuning pushes TTFT further to -39% by optimizing gpu_memory_utilization (0.95 vs 0.90), max_num_seqs (192 vs 256), and EPP routing weights (cache_optimized 5:1:2).</a:t>
             </a:r>
           </a:p>
         </p:txBody>
@@ -9510,7 +9510,7 @@
                   <a:srgbClr val="92400E"/>
                 </a:solidFill>
               </a:rPr>
-              <a:t>PD shows moderate improvement in 3.4: 10% lower TTFT P90 and 25% lower P99 on the same config. ITL dropped 25%, indicating faster decode. Tuning adds significant gains at P50 and P90 (-34%). Throughput stays roughly flat (~26 req/s) across versions as the system is concurrency-limited at 100 users. Note: P99 regressed with tuning (+8.6%) due to tail latency spikes at higher gpu_memory_utilization (0.95 vs 0.90).</a:t>
+              <a:t>PD shows moderate improvement in 3.4: 10% lower TTFT P90 and 25% lower P99 on the same config. ITL dropped 25%, indicating faster decode. Tuning adds significant gains at P50 and P90 (-34%). Throughput dropped ~11% due to the same EPP routing change: prefix-cache-scorer (weight 2) prioritizes cache hits over queue balance (weight 1). Note: P99 regressed with tuning (+8.6%) due to tail latency spikes at higher gpu_memory_utilization (0.95 vs 0.90).</a:t>
             </a:r>
           </a:p>
         </p:txBody>
@@ -13405,7 +13405,7 @@
                   <a:srgbClr val="166534"/>
                 </a:solidFill>
               </a:rPr>
-              <a:t>RHAIIS 3.4 is not a uniform improvement — PD consistently benefits, but aggregated depends on model and TP. For production deployments upgrading from 3.3 to 3.4, re-running configuration optimization is recommended. With tuning, all configurations exceed the 3.3 TTFT baseline by 21-64%. Throughput (req/s) is roughly constant across configs and versions — the real gain is latency.</a:t>
+              <a:t>RHAIIS 3.4 is not a uniform improvement — PD consistently benefits, but aggregated depends on model and TP. For production deployments upgrading from 3.3 to 3.4, re-running configuration optimization is recommended. With tuning, all configurations exceed the 3.3 TTFT baseline by 21-64%. Throughput dropped 11-28% due to EPP routing change in v0.6.0 (prefix-cache-scorer weight 2 vs queue-scorer weight 1) — a deliberate tradeoff for better per-user latency.</a:t>
             </a:r>
           </a:p>
         </p:txBody>
